--- a/paper modification/papers/Presentation1.pptx
+++ b/paper modification/papers/Presentation1.pptx
@@ -271,7 +271,7 @@
           <a:p>
             <a:fld id="{0FFCDA60-0D15-482F-89F7-BC447ADD2AEC}" type="datetimeFigureOut">
               <a:rPr lang="en-US" smtClean="0"/>
-              <a:t>8/23/2025</a:t>
+              <a:t>9/21/2026</a:t>
             </a:fld>
             <a:endParaRPr lang="en-US"/>
           </a:p>
@@ -469,7 +469,7 @@
           <a:p>
             <a:fld id="{0FFCDA60-0D15-482F-89F7-BC447ADD2AEC}" type="datetimeFigureOut">
               <a:rPr lang="en-US" smtClean="0"/>
-              <a:t>8/23/2025</a:t>
+              <a:t>9/21/2026</a:t>
             </a:fld>
             <a:endParaRPr lang="en-US"/>
           </a:p>
@@ -677,7 +677,7 @@
           <a:p>
             <a:fld id="{0FFCDA60-0D15-482F-89F7-BC447ADD2AEC}" type="datetimeFigureOut">
               <a:rPr lang="en-US" smtClean="0"/>
-              <a:t>8/23/2025</a:t>
+              <a:t>9/21/2026</a:t>
             </a:fld>
             <a:endParaRPr lang="en-US"/>
           </a:p>
@@ -875,7 +875,7 @@
           <a:p>
             <a:fld id="{0FFCDA60-0D15-482F-89F7-BC447ADD2AEC}" type="datetimeFigureOut">
               <a:rPr lang="en-US" smtClean="0"/>
-              <a:t>8/23/2025</a:t>
+              <a:t>9/21/2026</a:t>
             </a:fld>
             <a:endParaRPr lang="en-US"/>
           </a:p>
@@ -1150,7 +1150,7 @@
           <a:p>
             <a:fld id="{0FFCDA60-0D15-482F-89F7-BC447ADD2AEC}" type="datetimeFigureOut">
               <a:rPr lang="en-US" smtClean="0"/>
-              <a:t>8/23/2025</a:t>
+              <a:t>9/21/2026</a:t>
             </a:fld>
             <a:endParaRPr lang="en-US"/>
           </a:p>
@@ -1415,7 +1415,7 @@
           <a:p>
             <a:fld id="{0FFCDA60-0D15-482F-89F7-BC447ADD2AEC}" type="datetimeFigureOut">
               <a:rPr lang="en-US" smtClean="0"/>
-              <a:t>8/23/2025</a:t>
+              <a:t>9/21/2026</a:t>
             </a:fld>
             <a:endParaRPr lang="en-US"/>
           </a:p>
@@ -1827,7 +1827,7 @@
           <a:p>
             <a:fld id="{0FFCDA60-0D15-482F-89F7-BC447ADD2AEC}" type="datetimeFigureOut">
               <a:rPr lang="en-US" smtClean="0"/>
-              <a:t>8/23/2025</a:t>
+              <a:t>9/21/2026</a:t>
             </a:fld>
             <a:endParaRPr lang="en-US"/>
           </a:p>
@@ -1968,7 +1968,7 @@
           <a:p>
             <a:fld id="{0FFCDA60-0D15-482F-89F7-BC447ADD2AEC}" type="datetimeFigureOut">
               <a:rPr lang="en-US" smtClean="0"/>
-              <a:t>8/23/2025</a:t>
+              <a:t>9/21/2026</a:t>
             </a:fld>
             <a:endParaRPr lang="en-US"/>
           </a:p>
@@ -2081,7 +2081,7 @@
           <a:p>
             <a:fld id="{0FFCDA60-0D15-482F-89F7-BC447ADD2AEC}" type="datetimeFigureOut">
               <a:rPr lang="en-US" smtClean="0"/>
-              <a:t>8/23/2025</a:t>
+              <a:t>9/21/2026</a:t>
             </a:fld>
             <a:endParaRPr lang="en-US"/>
           </a:p>
@@ -2392,7 +2392,7 @@
           <a:p>
             <a:fld id="{0FFCDA60-0D15-482F-89F7-BC447ADD2AEC}" type="datetimeFigureOut">
               <a:rPr lang="en-US" smtClean="0"/>
-              <a:t>8/23/2025</a:t>
+              <a:t>9/21/2026</a:t>
             </a:fld>
             <a:endParaRPr lang="en-US"/>
           </a:p>
@@ -2680,7 +2680,7 @@
           <a:p>
             <a:fld id="{0FFCDA60-0D15-482F-89F7-BC447ADD2AEC}" type="datetimeFigureOut">
               <a:rPr lang="en-US" smtClean="0"/>
-              <a:t>8/23/2025</a:t>
+              <a:t>9/21/2026</a:t>
             </a:fld>
             <a:endParaRPr lang="en-US"/>
           </a:p>
@@ -2921,7 +2921,7 @@
           <a:p>
             <a:fld id="{0FFCDA60-0D15-482F-89F7-BC447ADD2AEC}" type="datetimeFigureOut">
               <a:rPr lang="en-US" smtClean="0"/>
-              <a:t>8/23/2025</a:t>
+              <a:t>9/21/2026</a:t>
             </a:fld>
             <a:endParaRPr lang="en-US"/>
           </a:p>
@@ -3480,8 +3480,8 @@
         </p:blipFill>
         <p:spPr>
           <a:xfrm>
-            <a:off x="826918" y="617969"/>
-            <a:ext cx="6667500" cy="5000625"/>
+            <a:off x="269134" y="589649"/>
+            <a:ext cx="4540610" cy="3405458"/>
           </a:xfrm>
           <a:prstGeom prst="rect">
             <a:avLst/>
